--- a/outputs/GPR_FDTD_FWI_SingleRebar_Next copy.pptx
+++ b/outputs/GPR_FDTD_FWI_SingleRebar_Next copy.pptx
@@ -5,7 +5,7 @@
     <p:sldMasterId id="2147483648" r:id="rId1"/>
   </p:sldMasterIdLst>
   <p:notesMasterIdLst>
-    <p:notesMasterId r:id="rId56"/>
+    <p:notesMasterId r:id="rId57"/>
   </p:notesMasterIdLst>
   <p:sldIdLst>
     <p:sldId id="256" r:id="rId2"/>
@@ -62,6 +62,7 @@
     <p:sldId id="307" r:id="rId53"/>
     <p:sldId id="308" r:id="rId54"/>
     <p:sldId id="309" r:id="rId55"/>
+    <p:sldId id="310" r:id="rId56"/>
   </p:sldIdLst>
   <p:sldSz cx="12192000" cy="6858000"/>
   <p:notesSz cx="6858000" cy="9144000"/>
@@ -3843,7 +3844,7 @@
           <a:p>
             <a:fld id="{5BCAD085-E8A6-8845-BD4E-CB4CCA059FC4}" type="datetimeFigureOut">
               <a:rPr lang="en-US" smtClean="0"/>
-              <a:t>5/29/26</a:t>
+              <a:t>6/5/26</a:t>
             </a:fld>
             <a:endParaRPr lang="en-US"/>
           </a:p>
@@ -4011,7 +4012,7 @@
           <a:p>
             <a:fld id="{5BCAD085-E8A6-8845-BD4E-CB4CCA059FC4}" type="datetimeFigureOut">
               <a:rPr lang="en-US" smtClean="0"/>
-              <a:t>5/29/26</a:t>
+              <a:t>6/5/26</a:t>
             </a:fld>
             <a:endParaRPr lang="en-US"/>
           </a:p>
@@ -4189,7 +4190,7 @@
           <a:p>
             <a:fld id="{5BCAD085-E8A6-8845-BD4E-CB4CCA059FC4}" type="datetimeFigureOut">
               <a:rPr lang="en-US" smtClean="0"/>
-              <a:t>5/29/26</a:t>
+              <a:t>6/5/26</a:t>
             </a:fld>
             <a:endParaRPr lang="en-US"/>
           </a:p>
@@ -4357,7 +4358,7 @@
           <a:p>
             <a:fld id="{5BCAD085-E8A6-8845-BD4E-CB4CCA059FC4}" type="datetimeFigureOut">
               <a:rPr lang="en-US" smtClean="0"/>
-              <a:t>5/29/26</a:t>
+              <a:t>6/5/26</a:t>
             </a:fld>
             <a:endParaRPr lang="en-US"/>
           </a:p>
@@ -4602,7 +4603,7 @@
           <a:p>
             <a:fld id="{5BCAD085-E8A6-8845-BD4E-CB4CCA059FC4}" type="datetimeFigureOut">
               <a:rPr lang="en-US" smtClean="0"/>
-              <a:t>5/29/26</a:t>
+              <a:t>6/5/26</a:t>
             </a:fld>
             <a:endParaRPr lang="en-US"/>
           </a:p>
@@ -4887,7 +4888,7 @@
           <a:p>
             <a:fld id="{5BCAD085-E8A6-8845-BD4E-CB4CCA059FC4}" type="datetimeFigureOut">
               <a:rPr lang="en-US" smtClean="0"/>
-              <a:t>5/29/26</a:t>
+              <a:t>6/5/26</a:t>
             </a:fld>
             <a:endParaRPr lang="en-US"/>
           </a:p>
@@ -5306,7 +5307,7 @@
           <a:p>
             <a:fld id="{5BCAD085-E8A6-8845-BD4E-CB4CCA059FC4}" type="datetimeFigureOut">
               <a:rPr lang="en-US" smtClean="0"/>
-              <a:t>5/29/26</a:t>
+              <a:t>6/5/26</a:t>
             </a:fld>
             <a:endParaRPr lang="en-US"/>
           </a:p>
@@ -5423,7 +5424,7 @@
           <a:p>
             <a:fld id="{5BCAD085-E8A6-8845-BD4E-CB4CCA059FC4}" type="datetimeFigureOut">
               <a:rPr lang="en-US" smtClean="0"/>
-              <a:t>5/29/26</a:t>
+              <a:t>6/5/26</a:t>
             </a:fld>
             <a:endParaRPr lang="en-US"/>
           </a:p>
@@ -5518,7 +5519,7 @@
           <a:p>
             <a:fld id="{5BCAD085-E8A6-8845-BD4E-CB4CCA059FC4}" type="datetimeFigureOut">
               <a:rPr lang="en-US" smtClean="0"/>
-              <a:t>5/29/26</a:t>
+              <a:t>6/5/26</a:t>
             </a:fld>
             <a:endParaRPr lang="en-US"/>
           </a:p>
@@ -5793,7 +5794,7 @@
           <a:p>
             <a:fld id="{5BCAD085-E8A6-8845-BD4E-CB4CCA059FC4}" type="datetimeFigureOut">
               <a:rPr lang="en-US" smtClean="0"/>
-              <a:t>5/29/26</a:t>
+              <a:t>6/5/26</a:t>
             </a:fld>
             <a:endParaRPr lang="en-US"/>
           </a:p>
@@ -6045,7 +6046,7 @@
           <a:p>
             <a:fld id="{5BCAD085-E8A6-8845-BD4E-CB4CCA059FC4}" type="datetimeFigureOut">
               <a:rPr lang="en-US" smtClean="0"/>
-              <a:t>5/29/26</a:t>
+              <a:t>6/5/26</a:t>
             </a:fld>
             <a:endParaRPr lang="en-US"/>
           </a:p>
@@ -6256,7 +6257,7 @@
           <a:p>
             <a:fld id="{5BCAD085-E8A6-8845-BD4E-CB4CCA059FC4}" type="datetimeFigureOut">
               <a:rPr lang="en-US" smtClean="0"/>
-              <a:t>5/29/26</a:t>
+              <a:t>6/5/26</a:t>
             </a:fld>
             <a:endParaRPr lang="en-US"/>
           </a:p>
@@ -32569,6 +32570,36 @@
 </p:sld>
 </file>
 
+<file path=ppt/slides/slide55.xml><?xml version="1.0" encoding="utf-8"?>
+<p:sld xmlns:a="http://schemas.openxmlformats.org/drawingml/2006/main" xmlns:r="http://schemas.openxmlformats.org/officeDocument/2006/relationships" xmlns:p="http://schemas.openxmlformats.org/presentationml/2006/main">
+  <p:cSld>
+    <p:spTree>
+      <p:nvGrpSpPr>
+        <p:cNvPr id="1" name=""/>
+        <p:cNvGrpSpPr/>
+        <p:nvPr/>
+      </p:nvGrpSpPr>
+      <p:grpSpPr>
+        <a:xfrm>
+          <a:off x="0" y="0"/>
+          <a:ext cx="0" cy="0"/>
+          <a:chOff x="0" y="0"/>
+          <a:chExt cx="0" cy="0"/>
+        </a:xfrm>
+      </p:grpSpPr>
+    </p:spTree>
+    <p:extLst>
+      <p:ext uri="{BB962C8B-B14F-4D97-AF65-F5344CB8AC3E}">
+        <p14:creationId xmlns:p14="http://schemas.microsoft.com/office/powerpoint/2010/main" val="1272582746"/>
+      </p:ext>
+    </p:extLst>
+  </p:cSld>
+  <p:clrMapOvr>
+    <a:masterClrMapping/>
+  </p:clrMapOvr>
+</p:sld>
+</file>
+
 <file path=ppt/slides/slide6.xml><?xml version="1.0" encoding="utf-8"?>
 <p:sld xmlns:a="http://schemas.openxmlformats.org/drawingml/2006/main" xmlns:r="http://schemas.openxmlformats.org/officeDocument/2006/relationships" xmlns:p="http://schemas.openxmlformats.org/presentationml/2006/main">
   <p:cSld>
